--- a/figures/Figure_03_edit.pptx
+++ b/figures/Figure_03_edit.pptx
@@ -249,11 +249,107 @@
     </a:lvl9pPr>
   </p:defaultTextStyle>
   <p:extLst>
+    <p:ext uri="{EFAFB233-063F-42B5-8137-9DF3F51BA10A}">
+      <p15:sldGuideLst xmlns:p15="http://schemas.microsoft.com/office/powerpoint/2012/main"/>
+    </p:ext>
     <p:ext uri="GoogleSlidesCustomDataVersion2">
-      <go:slidesCustomData xmlns:go="http://customooxmlschemas.google.com/" xmlns:ahyp="http://schemas.microsoft.com/office/drawing/2018/hyperlinkcolor" xmlns:p15="http://schemas.microsoft.com/office/powerpoint/2012/main" xmlns:p14="http://schemas.microsoft.com/office/powerpoint/2010/main" xmlns:com="http://schemas.openxmlformats.org/drawingml/2006/compatibility" xmlns:pvml="urn:schemas-microsoft-com:office:powerpoint" xmlns:v="urn:schemas-microsoft-com:vml" xmlns:o="urn:schemas-microsoft-com:office:office" xmlns:dgm="http://schemas.openxmlformats.org/drawingml/2006/diagram" xmlns:c="http://schemas.openxmlformats.org/drawingml/2006/chart" xmlns:mv="urn:schemas-microsoft-com:mac:vml" xmlns:mc="http://schemas.openxmlformats.org/markup-compatibility/2006" xmlns="" r:id="rId8" roundtripDataSignature="AMtx7mglr+ZyAK+TXPefz0sSZ9yEMS1meg=="/>
+      <go:slidesCustomData xmlns="" xmlns:mc="http://schemas.openxmlformats.org/markup-compatibility/2006" xmlns:mv="urn:schemas-microsoft-com:mac:vml" xmlns:c="http://schemas.openxmlformats.org/drawingml/2006/chart" xmlns:dgm="http://schemas.openxmlformats.org/drawingml/2006/diagram" xmlns:o="urn:schemas-microsoft-com:office:office" xmlns:v="urn:schemas-microsoft-com:vml" xmlns:pvml="urn:schemas-microsoft-com:office:powerpoint" xmlns:com="http://schemas.openxmlformats.org/drawingml/2006/compatibility" xmlns:p14="http://schemas.microsoft.com/office/powerpoint/2010/main" xmlns:p15="http://schemas.microsoft.com/office/powerpoint/2012/main" xmlns:ahyp="http://schemas.microsoft.com/office/drawing/2018/hyperlinkcolor" xmlns:go="http://customooxmlschemas.google.com/" r:id="rId8" roundtripDataSignature="AMtx7mglr+ZyAK+TXPefz0sSZ9yEMS1meg=="/>
     </p:ext>
   </p:extLst>
 </p:presentation>
+</file>
+
+<file path=ppt/revisionInfo.xml><?xml version="1.0" encoding="utf-8"?>
+<p1510:revInfo xmlns:a="http://schemas.openxmlformats.org/drawingml/2006/main" xmlns:r="http://schemas.openxmlformats.org/officeDocument/2006/relationships" xmlns:p1510="http://schemas.microsoft.com/office/powerpoint/2015/10/main">
+  <p1510:revLst>
+    <p1510:client id="{E12FC769-644D-4826-9830-AD5C03AE2FD3}" v="3" dt="2025-06-13T05:58:48.264"/>
+  </p1510:revLst>
+</p1510:revInfo>
+</file>
+
+<file path=ppt/changesInfos/changesInfo1.xml><?xml version="1.0" encoding="utf-8"?>
+<pc:chgInfo xmlns:a="http://schemas.openxmlformats.org/drawingml/2006/main" xmlns:r="http://schemas.openxmlformats.org/officeDocument/2006/relationships" xmlns:ac="http://schemas.microsoft.com/office/drawing/2013/main/command" xmlns:pc="http://schemas.microsoft.com/office/powerpoint/2013/main/command">
+  <pc:docChgLst>
+    <pc:chgData name="Renata de Lara Muylaert" userId="0867cccb-c3a2-4fe1-98fb-a480d9aef68d" providerId="ADAL" clId="{E12FC769-644D-4826-9830-AD5C03AE2FD3}"/>
+    <pc:docChg chg="undo custSel modSld">
+      <pc:chgData name="Renata de Lara Muylaert" userId="0867cccb-c3a2-4fe1-98fb-a480d9aef68d" providerId="ADAL" clId="{E12FC769-644D-4826-9830-AD5C03AE2FD3}" dt="2025-06-13T06:00:27.538" v="98" actId="14100"/>
+      <pc:docMkLst>
+        <pc:docMk/>
+      </pc:docMkLst>
+      <pc:sldChg chg="addSp delSp modSp mod">
+        <pc:chgData name="Renata de Lara Muylaert" userId="0867cccb-c3a2-4fe1-98fb-a480d9aef68d" providerId="ADAL" clId="{E12FC769-644D-4826-9830-AD5C03AE2FD3}" dt="2025-06-13T06:00:27.538" v="98" actId="14100"/>
+        <pc:sldMkLst>
+          <pc:docMk/>
+          <pc:sldMk cId="0" sldId="256"/>
+        </pc:sldMkLst>
+        <pc:spChg chg="mod">
+          <ac:chgData name="Renata de Lara Muylaert" userId="0867cccb-c3a2-4fe1-98fb-a480d9aef68d" providerId="ADAL" clId="{E12FC769-644D-4826-9830-AD5C03AE2FD3}" dt="2025-06-13T05:51:29.337" v="61" actId="20577"/>
+          <ac:spMkLst>
+            <pc:docMk/>
+            <pc:sldMk cId="0" sldId="256"/>
+            <ac:spMk id="138" creationId="{00000000-0000-0000-0000-000000000000}"/>
+          </ac:spMkLst>
+        </pc:spChg>
+        <pc:spChg chg="mod ord">
+          <ac:chgData name="Renata de Lara Muylaert" userId="0867cccb-c3a2-4fe1-98fb-a480d9aef68d" providerId="ADAL" clId="{E12FC769-644D-4826-9830-AD5C03AE2FD3}" dt="2025-06-13T05:51:21.744" v="41" actId="167"/>
+          <ac:spMkLst>
+            <pc:docMk/>
+            <pc:sldMk cId="0" sldId="256"/>
+            <ac:spMk id="139" creationId="{00000000-0000-0000-0000-000000000000}"/>
+          </ac:spMkLst>
+        </pc:spChg>
+        <pc:grpChg chg="add del mod">
+          <ac:chgData name="Renata de Lara Muylaert" userId="0867cccb-c3a2-4fe1-98fb-a480d9aef68d" providerId="ADAL" clId="{E12FC769-644D-4826-9830-AD5C03AE2FD3}" dt="2025-06-13T05:59:27.915" v="84" actId="1076"/>
+          <ac:grpSpMkLst>
+            <pc:docMk/>
+            <pc:sldMk cId="0" sldId="256"/>
+            <ac:grpSpMk id="137" creationId="{00000000-0000-0000-0000-000000000000}"/>
+          </ac:grpSpMkLst>
+        </pc:grpChg>
+        <pc:picChg chg="add mod modCrop">
+          <ac:chgData name="Renata de Lara Muylaert" userId="0867cccb-c3a2-4fe1-98fb-a480d9aef68d" providerId="ADAL" clId="{E12FC769-644D-4826-9830-AD5C03AE2FD3}" dt="2025-06-13T06:00:11.260" v="96" actId="732"/>
+          <ac:picMkLst>
+            <pc:docMk/>
+            <pc:sldMk cId="0" sldId="256"/>
+            <ac:picMk id="2" creationId="{F1381D91-4B5F-2ACD-61FA-696A340F5322}"/>
+          </ac:picMkLst>
+        </pc:picChg>
+        <pc:picChg chg="add del mod ord modCrop">
+          <ac:chgData name="Renata de Lara Muylaert" userId="0867cccb-c3a2-4fe1-98fb-a480d9aef68d" providerId="ADAL" clId="{E12FC769-644D-4826-9830-AD5C03AE2FD3}" dt="2025-06-13T05:58:47.847" v="67" actId="478"/>
+          <ac:picMkLst>
+            <pc:docMk/>
+            <pc:sldMk cId="0" sldId="256"/>
+            <ac:picMk id="4" creationId="{FB5BC70B-5CFD-B1DB-1A92-62D9328F3A8C}"/>
+          </ac:picMkLst>
+        </pc:picChg>
+        <pc:picChg chg="add mod ord modCrop">
+          <ac:chgData name="Renata de Lara Muylaert" userId="0867cccb-c3a2-4fe1-98fb-a480d9aef68d" providerId="ADAL" clId="{E12FC769-644D-4826-9830-AD5C03AE2FD3}" dt="2025-06-13T06:00:05.817" v="94" actId="1076"/>
+          <ac:picMkLst>
+            <pc:docMk/>
+            <pc:sldMk cId="0" sldId="256"/>
+            <ac:picMk id="7" creationId="{EAB4CFD4-C12F-841C-4518-51626A3CDDF8}"/>
+          </ac:picMkLst>
+        </pc:picChg>
+        <pc:picChg chg="add del mod modCrop">
+          <ac:chgData name="Renata de Lara Muylaert" userId="0867cccb-c3a2-4fe1-98fb-a480d9aef68d" providerId="ADAL" clId="{E12FC769-644D-4826-9830-AD5C03AE2FD3}" dt="2025-06-13T06:00:27.538" v="98" actId="14100"/>
+          <ac:picMkLst>
+            <pc:docMk/>
+            <pc:sldMk cId="0" sldId="256"/>
+            <ac:picMk id="89" creationId="{00000000-0000-0000-0000-000000000000}"/>
+          </ac:picMkLst>
+        </pc:picChg>
+        <pc:picChg chg="mod">
+          <ac:chgData name="Renata de Lara Muylaert" userId="0867cccb-c3a2-4fe1-98fb-a480d9aef68d" providerId="ADAL" clId="{E12FC769-644D-4826-9830-AD5C03AE2FD3}" dt="2025-06-13T05:59:35.601" v="85" actId="1076"/>
+          <ac:picMkLst>
+            <pc:docMk/>
+            <pc:sldMk cId="0" sldId="256"/>
+            <ac:picMk id="140" creationId="{00000000-0000-0000-0000-000000000000}"/>
+          </ac:picMkLst>
+        </pc:picChg>
+      </pc:sldChg>
+    </pc:docChg>
+  </pc:docChgLst>
+</pc:chgInfo>
 </file>
 
 <file path=ppt/notesMasters/notesMaster1.xml><?xml version="1.0" encoding="utf-8"?>
@@ -11857,21 +11953,54 @@
       </p:grpSpPr>
       <p:pic>
         <p:nvPicPr>
+          <p:cNvPr id="7" name="Picture 6" descr="A diagram of a medical use&#10;&#10;AI-generated content may be incorrect.">
+            <a:extLst>
+              <a:ext uri="{FF2B5EF4-FFF2-40B4-BE49-F238E27FC236}">
+                <a16:creationId xmlns:a16="http://schemas.microsoft.com/office/drawing/2014/main" id="{EAB4CFD4-C12F-841C-4518-51626A3CDDF8}"/>
+              </a:ext>
+            </a:extLst>
+          </p:cNvPr>
+          <p:cNvPicPr>
+            <a:picLocks noChangeAspect="1"/>
+          </p:cNvPicPr>
+          <p:nvPr/>
+        </p:nvPicPr>
+        <p:blipFill>
+          <a:blip r:embed="rId3"/>
+          <a:srcRect t="7503"/>
+          <a:stretch>
+            <a:fillRect/>
+          </a:stretch>
+        </p:blipFill>
+        <p:spPr>
+          <a:xfrm>
+            <a:off x="433074" y="2385298"/>
+            <a:ext cx="4835514" cy="4472702"/>
+          </a:xfrm>
+          <a:prstGeom prst="rect">
+            <a:avLst/>
+          </a:prstGeom>
+        </p:spPr>
+      </p:pic>
+      <p:pic>
+        <p:nvPicPr>
           <p:cNvPr id="89" name="Google Shape;89;p2"/>
           <p:cNvPicPr preferRelativeResize="0"/>
           <p:nvPr/>
         </p:nvPicPr>
         <p:blipFill rotWithShape="1">
-          <a:blip r:embed="rId3">
+          <a:blip r:embed="rId4">
             <a:alphaModFix/>
           </a:blip>
-          <a:srcRect t="13876"/>
-          <a:stretch/>
+          <a:srcRect l="42120" t="13876" r="39789" b="49053"/>
+          <a:stretch>
+            <a:fillRect/>
+          </a:stretch>
         </p:blipFill>
         <p:spPr>
           <a:xfrm>
-            <a:off x="-274829" y="1892813"/>
-            <a:ext cx="5734050" cy="4930190"/>
+            <a:off x="2325060" y="1962248"/>
+            <a:ext cx="1375009" cy="2595234"/>
           </a:xfrm>
           <a:prstGeom prst="rect">
             <a:avLst/>
@@ -14153,12 +14282,12 @@
           <p:nvPr/>
         </p:nvPicPr>
         <p:blipFill rotWithShape="1">
-          <a:blip r:embed="rId4">
+          <a:blip r:embed="rId5">
             <a:alphaModFix/>
             <a:extLst>
               <a:ext uri="{BEBA8EAE-BF5A-486C-A8C5-ECC9F3942E4B}">
                 <a14:imgProps xmlns:a14="http://schemas.microsoft.com/office/drawing/2010/main">
-                  <a14:imgLayer r:embed="rId5">
+                  <a14:imgLayer r:embed="rId6">
                     <a14:imgEffect>
                       <a14:colorTemperature colorTemp="4700"/>
                     </a14:imgEffect>
@@ -14193,7 +14322,7 @@
           <p:nvPr/>
         </p:nvPicPr>
         <p:blipFill rotWithShape="1">
-          <a:blip r:embed="rId6">
+          <a:blip r:embed="rId7">
             <a:alphaModFix/>
           </a:blip>
           <a:srcRect/>
@@ -14555,12 +14684,120 @@
         </p:nvGrpSpPr>
         <p:grpSpPr>
           <a:xfrm>
-            <a:off x="-1077993" y="2532850"/>
-            <a:ext cx="980145" cy="3455201"/>
-            <a:chOff x="1752986" y="2289536"/>
-            <a:chExt cx="546427" cy="2012984"/>
+            <a:off x="-639727" y="2670469"/>
+            <a:ext cx="980147" cy="3455201"/>
+            <a:chOff x="1752985" y="2289536"/>
+            <a:chExt cx="546428" cy="2012984"/>
           </a:xfrm>
         </p:grpSpPr>
+        <p:sp>
+          <p:nvSpPr>
+            <p:cNvPr id="139" name="Google Shape;139;p2"/>
+            <p:cNvSpPr/>
+            <p:nvPr/>
+          </p:nvSpPr>
+          <p:spPr>
+            <a:xfrm rot="16200000">
+              <a:off x="989453" y="3053068"/>
+              <a:ext cx="2012984" cy="485919"/>
+            </a:xfrm>
+            <a:prstGeom prst="rect">
+              <a:avLst/>
+            </a:prstGeom>
+            <a:solidFill>
+              <a:schemeClr val="lt1"/>
+            </a:solidFill>
+            <a:ln>
+              <a:noFill/>
+            </a:ln>
+          </p:spPr>
+          <p:txBody>
+            <a:bodyPr spcFirstLastPara="1" wrap="square" lIns="91425" tIns="45700" rIns="91425" bIns="45700" anchor="t" anchorCtr="0">
+              <a:noAutofit/>
+            </a:bodyPr>
+            <a:lstStyle/>
+            <a:p>
+              <a:pPr marL="0" lvl="0" indent="0" algn="l" rtl="0">
+                <a:lnSpc>
+                  <a:spcPct val="90000"/>
+                </a:lnSpc>
+                <a:spcBef>
+                  <a:spcPts val="0"/>
+                </a:spcBef>
+                <a:spcAft>
+                  <a:spcPts val="0"/>
+                </a:spcAft>
+                <a:buClr>
+                  <a:schemeClr val="dk1"/>
+                </a:buClr>
+                <a:buSzPts val="1100"/>
+                <a:buFont typeface="Arial"/>
+                <a:buNone/>
+              </a:pPr>
+              <a:r>
+                <a:rPr lang="en-US" sz="2400" dirty="0">
+                  <a:solidFill>
+                    <a:schemeClr val="dk1"/>
+                  </a:solidFill>
+                </a:rPr>
+                <a:t>The network</a:t>
+              </a:r>
+              <a:endParaRPr sz="2400" dirty="0">
+                <a:solidFill>
+                  <a:schemeClr val="dk1"/>
+                </a:solidFill>
+              </a:endParaRPr>
+            </a:p>
+            <a:p>
+              <a:pPr marL="0" lvl="0" indent="0" algn="l" rtl="0">
+                <a:lnSpc>
+                  <a:spcPct val="90000"/>
+                </a:lnSpc>
+                <a:spcBef>
+                  <a:spcPts val="1000"/>
+                </a:spcBef>
+                <a:spcAft>
+                  <a:spcPts val="0"/>
+                </a:spcAft>
+                <a:buClr>
+                  <a:schemeClr val="dk1"/>
+                </a:buClr>
+                <a:buSzPts val="1100"/>
+                <a:buFont typeface="Arial"/>
+                <a:buNone/>
+              </a:pPr>
+              <a:r>
+                <a:rPr lang="en-US" sz="2400" dirty="0">
+                  <a:solidFill>
+                    <a:schemeClr val="dk1"/>
+                  </a:solidFill>
+                </a:rPr>
+                <a:t>we see </a:t>
+              </a:r>
+              <a:endParaRPr sz="2400" dirty="0">
+                <a:solidFill>
+                  <a:schemeClr val="dk1"/>
+                </a:solidFill>
+              </a:endParaRPr>
+            </a:p>
+            <a:p>
+              <a:pPr marL="0" marR="0" lvl="0" indent="0" algn="l" rtl="0">
+                <a:spcBef>
+                  <a:spcPts val="1000"/>
+                </a:spcBef>
+                <a:spcAft>
+                  <a:spcPts val="0"/>
+                </a:spcAft>
+                <a:buNone/>
+              </a:pPr>
+              <a:endParaRPr sz="3200" dirty="0">
+                <a:solidFill>
+                  <a:schemeClr val="dk1"/>
+                </a:solidFill>
+              </a:endParaRPr>
+            </a:p>
+          </p:txBody>
+        </p:sp>
         <p:sp>
           <p:nvSpPr>
             <p:cNvPr id="138" name="Google Shape;138;p2"/>
@@ -14603,167 +14840,7 @@
                 <a:buFont typeface="Arial"/>
                 <a:buNone/>
               </a:pPr>
-              <a:r>
-                <a:rPr lang="en-US" sz="2400">
-                  <a:solidFill>
-                    <a:schemeClr val="dk1"/>
-                  </a:solidFill>
-                  <a:latin typeface="Arial"/>
-                  <a:ea typeface="Arial"/>
-                  <a:cs typeface="Arial"/>
-                  <a:sym typeface="Arial"/>
-                </a:rPr>
-                <a:t>The network </a:t>
-              </a:r>
-              <a:endParaRPr/>
-            </a:p>
-            <a:p>
-              <a:pPr marL="0" marR="0" lvl="0" indent="0" algn="l" rtl="0">
-                <a:lnSpc>
-                  <a:spcPct val="90000"/>
-                </a:lnSpc>
-                <a:spcBef>
-                  <a:spcPts val="840"/>
-                </a:spcBef>
-                <a:spcAft>
-                  <a:spcPts val="0"/>
-                </a:spcAft>
-                <a:buClr>
-                  <a:schemeClr val="dk1"/>
-                </a:buClr>
-                <a:buSzPts val="2400"/>
-                <a:buFont typeface="Arial"/>
-                <a:buNone/>
-              </a:pPr>
-              <a:r>
-                <a:rPr lang="en-US" sz="2400">
-                  <a:solidFill>
-                    <a:schemeClr val="dk1"/>
-                  </a:solidFill>
-                  <a:latin typeface="Arial"/>
-                  <a:ea typeface="Arial"/>
-                  <a:cs typeface="Arial"/>
-                  <a:sym typeface="Arial"/>
-                </a:rPr>
-                <a:t>we see </a:t>
-              </a:r>
-              <a:endParaRPr sz="2400">
-                <a:solidFill>
-                  <a:schemeClr val="dk1"/>
-                </a:solidFill>
-                <a:latin typeface="Arial"/>
-                <a:ea typeface="Arial"/>
-                <a:cs typeface="Arial"/>
-                <a:sym typeface="Arial"/>
-              </a:endParaRPr>
-            </a:p>
-          </p:txBody>
-        </p:sp>
-        <p:sp>
-          <p:nvSpPr>
-            <p:cNvPr id="139" name="Google Shape;139;p2"/>
-            <p:cNvSpPr/>
-            <p:nvPr/>
-          </p:nvSpPr>
-          <p:spPr>
-            <a:xfrm rot="-5400000">
-              <a:off x="989453" y="3053068"/>
-              <a:ext cx="2012984" cy="485919"/>
-            </a:xfrm>
-            <a:prstGeom prst="rect">
-              <a:avLst/>
-            </a:prstGeom>
-            <a:solidFill>
-              <a:schemeClr val="lt1"/>
-            </a:solidFill>
-            <a:ln>
-              <a:noFill/>
-            </a:ln>
-          </p:spPr>
-          <p:txBody>
-            <a:bodyPr spcFirstLastPara="1" wrap="square" lIns="91425" tIns="45700" rIns="91425" bIns="45700" anchor="t" anchorCtr="0">
-              <a:noAutofit/>
-            </a:bodyPr>
-            <a:lstStyle/>
-            <a:p>
-              <a:pPr marL="0" lvl="0" indent="0" algn="l" rtl="0">
-                <a:lnSpc>
-                  <a:spcPct val="90000"/>
-                </a:lnSpc>
-                <a:spcBef>
-                  <a:spcPts val="0"/>
-                </a:spcBef>
-                <a:spcAft>
-                  <a:spcPts val="0"/>
-                </a:spcAft>
-                <a:buClr>
-                  <a:schemeClr val="dk1"/>
-                </a:buClr>
-                <a:buSzPts val="1100"/>
-                <a:buFont typeface="Arial"/>
-                <a:buNone/>
-              </a:pPr>
-              <a:r>
-                <a:rPr lang="en-US" sz="2400">
-                  <a:solidFill>
-                    <a:schemeClr val="dk1"/>
-                  </a:solidFill>
-                </a:rPr>
-                <a:t>The network</a:t>
-              </a:r>
-              <a:endParaRPr sz="2400">
-                <a:solidFill>
-                  <a:schemeClr val="dk1"/>
-                </a:solidFill>
-              </a:endParaRPr>
-            </a:p>
-            <a:p>
-              <a:pPr marL="0" lvl="0" indent="0" algn="l" rtl="0">
-                <a:lnSpc>
-                  <a:spcPct val="90000"/>
-                </a:lnSpc>
-                <a:spcBef>
-                  <a:spcPts val="1000"/>
-                </a:spcBef>
-                <a:spcAft>
-                  <a:spcPts val="0"/>
-                </a:spcAft>
-                <a:buClr>
-                  <a:schemeClr val="dk1"/>
-                </a:buClr>
-                <a:buSzPts val="1100"/>
-                <a:buFont typeface="Arial"/>
-                <a:buNone/>
-              </a:pPr>
-              <a:r>
-                <a:rPr lang="en-US" sz="2400">
-                  <a:solidFill>
-                    <a:schemeClr val="dk1"/>
-                  </a:solidFill>
-                </a:rPr>
-                <a:t>we see </a:t>
-              </a:r>
-              <a:endParaRPr sz="2400">
-                <a:solidFill>
-                  <a:schemeClr val="dk1"/>
-                </a:solidFill>
-              </a:endParaRPr>
-            </a:p>
-            <a:p>
-              <a:pPr marL="0" marR="0" lvl="0" indent="0" algn="l" rtl="0">
-                <a:spcBef>
-                  <a:spcPts val="1000"/>
-                </a:spcBef>
-                <a:spcAft>
-                  <a:spcPts val="0"/>
-                </a:spcAft>
-                <a:buNone/>
-              </a:pPr>
-              <a:endParaRPr sz="3200">
-                <a:solidFill>
-                  <a:schemeClr val="dk1"/>
-                </a:solidFill>
-              </a:endParaRPr>
+              <a:endParaRPr dirty="0"/>
             </a:p>
           </p:txBody>
         </p:sp>
@@ -14775,7 +14852,7 @@
           <p:nvPr/>
         </p:nvPicPr>
         <p:blipFill rotWithShape="1">
-          <a:blip r:embed="rId7">
+          <a:blip r:embed="rId8">
             <a:alphaModFix/>
           </a:blip>
           <a:srcRect/>
@@ -14783,7 +14860,7 @@
         </p:blipFill>
         <p:spPr>
           <a:xfrm>
-            <a:off x="-1104452" y="2504674"/>
+            <a:off x="-585745" y="2532849"/>
             <a:ext cx="914400" cy="914400"/>
           </a:xfrm>
           <a:prstGeom prst="rect">
@@ -14802,7 +14879,7 @@
           <p:nvPr/>
         </p:nvPicPr>
         <p:blipFill rotWithShape="1">
-          <a:blip r:embed="rId8">
+          <a:blip r:embed="rId9">
             <a:alphaModFix/>
           </a:blip>
           <a:srcRect/>
@@ -14829,7 +14906,7 @@
           <p:nvPr/>
         </p:nvPicPr>
         <p:blipFill rotWithShape="1">
-          <a:blip r:embed="rId9">
+          <a:blip r:embed="rId10">
             <a:alphaModFix/>
           </a:blip>
           <a:srcRect/>
@@ -14856,7 +14933,7 @@
           <p:nvPr/>
         </p:nvPicPr>
         <p:blipFill rotWithShape="1">
-          <a:blip r:embed="rId9">
+          <a:blip r:embed="rId10">
             <a:alphaModFix/>
           </a:blip>
           <a:srcRect/>
@@ -14921,7 +14998,7 @@
                 <a:sym typeface="Arial"/>
                 <a:extLst>
                   <a:ext uri="http://customooxmlschemas.google.com/">
-                    <go:slidesCustomData xmlns:go="http://customooxmlschemas.google.com/" xmlns:ahyp="http://schemas.microsoft.com/office/drawing/2018/hyperlinkcolor" xmlns:p15="http://schemas.microsoft.com/office/powerpoint/2012/main" xmlns:p14="http://schemas.microsoft.com/office/powerpoint/2010/main" xmlns:com="http://schemas.openxmlformats.org/drawingml/2006/compatibility" xmlns:pvml="urn:schemas-microsoft-com:office:powerpoint" xmlns:v="urn:schemas-microsoft-com:vml" xmlns:o="urn:schemas-microsoft-com:office:office" xmlns:dgm="http://schemas.openxmlformats.org/drawingml/2006/diagram" xmlns:c="http://schemas.openxmlformats.org/drawingml/2006/chart" xmlns:mv="urn:schemas-microsoft-com:mac:vml" xmlns:mc="http://schemas.openxmlformats.org/markup-compatibility/2006" xmlns="" textRoundtripDataId="0"/>
+                    <go:slidesCustomData xmlns="" xmlns:mc="http://schemas.openxmlformats.org/markup-compatibility/2006" xmlns:mv="urn:schemas-microsoft-com:mac:vml" xmlns:c="http://schemas.openxmlformats.org/drawingml/2006/chart" xmlns:dgm="http://schemas.openxmlformats.org/drawingml/2006/diagram" xmlns:o="urn:schemas-microsoft-com:office:office" xmlns:v="urn:schemas-microsoft-com:vml" xmlns:pvml="urn:schemas-microsoft-com:office:powerpoint" xmlns:com="http://schemas.openxmlformats.org/drawingml/2006/compatibility" xmlns:p14="http://schemas.microsoft.com/office/powerpoint/2010/main" xmlns:p15="http://schemas.microsoft.com/office/powerpoint/2012/main" xmlns:ahyp="http://schemas.microsoft.com/office/drawing/2018/hyperlinkcolor" xmlns:go="http://customooxmlschemas.google.com/" textRoundtripDataId="0"/>
                   </a:ext>
                 </a:extLst>
               </a:rPr>
@@ -14982,10 +15059,10 @@
           <p:nvPr/>
         </p:nvPicPr>
         <p:blipFill>
-          <a:blip r:embed="rId10">
+          <a:blip r:embed="rId11">
             <a:extLst>
               <a:ext uri="{96DAC541-7B7A-43D3-8B79-37D633B846F1}">
-                <asvg:svgBlip xmlns:asvg="http://schemas.microsoft.com/office/drawing/2016/SVG/main" r:embed="rId11"/>
+                <asvg:svgBlip xmlns:asvg="http://schemas.microsoft.com/office/drawing/2016/SVG/main" r:embed="rId12"/>
               </a:ext>
             </a:extLst>
           </a:blip>
@@ -15001,6 +15078,41 @@
           <a:prstGeom prst="rect">
             <a:avLst/>
           </a:prstGeom>
+        </p:spPr>
+      </p:pic>
+      <p:pic>
+        <p:nvPicPr>
+          <p:cNvPr id="2" name="Google Shape;89;p2">
+            <a:extLst>
+              <a:ext uri="{FF2B5EF4-FFF2-40B4-BE49-F238E27FC236}">
+                <a16:creationId xmlns:a16="http://schemas.microsoft.com/office/drawing/2014/main" id="{F1381D91-4B5F-2ACD-61FA-696A340F5322}"/>
+              </a:ext>
+            </a:extLst>
+          </p:cNvPr>
+          <p:cNvPicPr preferRelativeResize="0"/>
+          <p:nvPr/>
+        </p:nvPicPr>
+        <p:blipFill rotWithShape="1">
+          <a:blip r:embed="rId4">
+            <a:alphaModFix/>
+          </a:blip>
+          <a:srcRect l="73997" t="29606" r="4865" b="60800"/>
+          <a:stretch>
+            <a:fillRect/>
+          </a:stretch>
+        </p:blipFill>
+        <p:spPr>
+          <a:xfrm>
+            <a:off x="3992491" y="3187326"/>
+            <a:ext cx="1212065" cy="549174"/>
+          </a:xfrm>
+          <a:prstGeom prst="rect">
+            <a:avLst/>
+          </a:prstGeom>
+          <a:noFill/>
+          <a:ln>
+            <a:noFill/>
+          </a:ln>
         </p:spPr>
       </p:pic>
     </p:spTree>
